--- a/img/SKE画像作成用.pptx
+++ b/img/SKE画像作成用.pptx
@@ -198,7 +198,7 @@
           <a:p>
             <a:fld id="{685A68BC-8F81-4B0D-92FD-71EB7813FF7D}" type="datetimeFigureOut">
               <a:rPr kumimoji="1" lang="ja-JP" altLang="en-US" smtClean="0"/>
-              <a:t>2025/5/2</a:t>
+              <a:t>2026/3/8</a:t>
             </a:fld>
             <a:endParaRPr kumimoji="1" lang="ja-JP" altLang="en-US"/>
           </a:p>
@@ -644,7 +644,7 @@
           <a:p>
             <a:fld id="{267EFEEF-E18A-4475-85ED-60EC09292CB4}" type="datetimeFigureOut">
               <a:rPr kumimoji="1" lang="ja-JP" altLang="en-US" smtClean="0"/>
-              <a:t>2025/5/2</a:t>
+              <a:t>2026/3/8</a:t>
             </a:fld>
             <a:endParaRPr kumimoji="1" lang="ja-JP" altLang="en-US"/>
           </a:p>
@@ -874,7 +874,7 @@
           <a:p>
             <a:fld id="{267EFEEF-E18A-4475-85ED-60EC09292CB4}" type="datetimeFigureOut">
               <a:rPr kumimoji="1" lang="ja-JP" altLang="en-US" smtClean="0"/>
-              <a:t>2025/5/2</a:t>
+              <a:t>2026/3/8</a:t>
             </a:fld>
             <a:endParaRPr kumimoji="1" lang="ja-JP" altLang="en-US"/>
           </a:p>
@@ -1114,7 +1114,7 @@
           <a:p>
             <a:fld id="{267EFEEF-E18A-4475-85ED-60EC09292CB4}" type="datetimeFigureOut">
               <a:rPr kumimoji="1" lang="ja-JP" altLang="en-US" smtClean="0"/>
-              <a:t>2025/5/2</a:t>
+              <a:t>2026/3/8</a:t>
             </a:fld>
             <a:endParaRPr kumimoji="1" lang="ja-JP" altLang="en-US"/>
           </a:p>
@@ -1344,7 +1344,7 @@
           <a:p>
             <a:fld id="{267EFEEF-E18A-4475-85ED-60EC09292CB4}" type="datetimeFigureOut">
               <a:rPr kumimoji="1" lang="ja-JP" altLang="en-US" smtClean="0"/>
-              <a:t>2025/5/2</a:t>
+              <a:t>2026/3/8</a:t>
             </a:fld>
             <a:endParaRPr kumimoji="1" lang="ja-JP" altLang="en-US"/>
           </a:p>
@@ -1619,7 +1619,7 @@
           <a:p>
             <a:fld id="{267EFEEF-E18A-4475-85ED-60EC09292CB4}" type="datetimeFigureOut">
               <a:rPr kumimoji="1" lang="ja-JP" altLang="en-US" smtClean="0"/>
-              <a:t>2025/5/2</a:t>
+              <a:t>2026/3/8</a:t>
             </a:fld>
             <a:endParaRPr kumimoji="1" lang="ja-JP" altLang="en-US"/>
           </a:p>
@@ -1948,7 +1948,7 @@
           <a:p>
             <a:fld id="{267EFEEF-E18A-4475-85ED-60EC09292CB4}" type="datetimeFigureOut">
               <a:rPr kumimoji="1" lang="ja-JP" altLang="en-US" smtClean="0"/>
-              <a:t>2025/5/2</a:t>
+              <a:t>2026/3/8</a:t>
             </a:fld>
             <a:endParaRPr kumimoji="1" lang="ja-JP" altLang="en-US"/>
           </a:p>
@@ -2424,7 +2424,7 @@
           <a:p>
             <a:fld id="{267EFEEF-E18A-4475-85ED-60EC09292CB4}" type="datetimeFigureOut">
               <a:rPr kumimoji="1" lang="ja-JP" altLang="en-US" smtClean="0"/>
-              <a:t>2025/5/2</a:t>
+              <a:t>2026/3/8</a:t>
             </a:fld>
             <a:endParaRPr kumimoji="1" lang="ja-JP" altLang="en-US"/>
           </a:p>
@@ -2565,7 +2565,7 @@
           <a:p>
             <a:fld id="{267EFEEF-E18A-4475-85ED-60EC09292CB4}" type="datetimeFigureOut">
               <a:rPr kumimoji="1" lang="ja-JP" altLang="en-US" smtClean="0"/>
-              <a:t>2025/5/2</a:t>
+              <a:t>2026/3/8</a:t>
             </a:fld>
             <a:endParaRPr kumimoji="1" lang="ja-JP" altLang="en-US"/>
           </a:p>
@@ -2678,7 +2678,7 @@
           <a:p>
             <a:fld id="{267EFEEF-E18A-4475-85ED-60EC09292CB4}" type="datetimeFigureOut">
               <a:rPr kumimoji="1" lang="ja-JP" altLang="en-US" smtClean="0"/>
-              <a:t>2025/5/2</a:t>
+              <a:t>2026/3/8</a:t>
             </a:fld>
             <a:endParaRPr kumimoji="1" lang="ja-JP" altLang="en-US"/>
           </a:p>
@@ -3021,7 +3021,7 @@
           <a:p>
             <a:fld id="{267EFEEF-E18A-4475-85ED-60EC09292CB4}" type="datetimeFigureOut">
               <a:rPr kumimoji="1" lang="ja-JP" altLang="en-US" smtClean="0"/>
-              <a:t>2025/5/2</a:t>
+              <a:t>2026/3/8</a:t>
             </a:fld>
             <a:endParaRPr kumimoji="1" lang="ja-JP" altLang="en-US"/>
           </a:p>
@@ -3309,7 +3309,7 @@
           <a:p>
             <a:fld id="{267EFEEF-E18A-4475-85ED-60EC09292CB4}" type="datetimeFigureOut">
               <a:rPr kumimoji="1" lang="ja-JP" altLang="en-US" smtClean="0"/>
-              <a:t>2025/5/2</a:t>
+              <a:t>2026/3/8</a:t>
             </a:fld>
             <a:endParaRPr kumimoji="1" lang="ja-JP" altLang="en-US"/>
           </a:p>
@@ -3582,7 +3582,7 @@
           <a:p>
             <a:fld id="{267EFEEF-E18A-4475-85ED-60EC09292CB4}" type="datetimeFigureOut">
               <a:rPr kumimoji="1" lang="ja-JP" altLang="en-US" smtClean="0"/>
-              <a:t>2025/5/2</a:t>
+              <a:t>2026/3/8</a:t>
             </a:fld>
             <a:endParaRPr kumimoji="1" lang="ja-JP" altLang="en-US"/>
           </a:p>
@@ -6495,7 +6495,15 @@
                     <a:srgbClr val="FF0000"/>
                   </a:solidFill>
                 </a:rPr>
-                <a:t>7,8,9</a:t>
+                <a:t>7…</a:t>
+              </a:r>
+              <a:r>
+                <a:rPr lang="en-US" altLang="ja-JP" sz="2000" b="1" dirty="0">
+                  <a:solidFill>
+                    <a:srgbClr val="FF0000"/>
+                  </a:solidFill>
+                </a:rPr>
+                <a:t>11</a:t>
               </a:r>
               <a:endParaRPr kumimoji="1" lang="ja-JP" altLang="en-US" sz="2000" b="1" dirty="0">
                 <a:solidFill>
@@ -7775,12 +7783,12 @@
             <a:lstStyle/>
             <a:p>
               <a:r>
-                <a:rPr kumimoji="1" lang="en-US" altLang="ja-JP" sz="2000" b="1" dirty="0">
+                <a:rPr kumimoji="1" lang="en-US" altLang="ja-JP" sz="2000" b="1">
                   <a:solidFill>
                     <a:srgbClr val="FF0000"/>
                   </a:solidFill>
                 </a:rPr>
-                <a:t>7,8,9</a:t>
+                <a:t>7…11</a:t>
               </a:r>
               <a:endParaRPr kumimoji="1" lang="ja-JP" altLang="en-US" sz="2000" b="1" dirty="0">
                 <a:solidFill>
